--- a/OSu/Chap14.pptx
+++ b/OSu/Chap14.pptx
@@ -15688,7 +15688,7 @@
           <a:p>
             <a:r>
               <a:rPr lang="en-US" altLang="en-US" sz="2400" dirty="0"/>
-              <a:t>An allocation method refers to how disk blocks are allocated for files:</a:t>
+              <a:t>An allocation method refers to how disk blocks are allocated for files</a:t>
             </a:r>
           </a:p>
           <a:p>
